--- a/decks/combined-circuits/combined-circuits_ch5_series-circuits.pptx
+++ b/decks/combined-circuits/combined-circuits_ch5_series-circuits.pptx
@@ -121,28 +121,28 @@
   <p:extLst>
     <p:ext uri="{521415D9-36F7-43E2-AB2F-B90AF26B5E84}">
       <p14:sectionLst xmlns:p14="http://schemas.microsoft.com/office/powerpoint/2010/main">
-        <p14:section name="Opening" id="{6800c780-33d3-dff6-5771-c5d17c85899c}">
+        <p14:section name="Opening" id="{cba90bf4-76d9-a2e7-e974-c722737f8ade}">
           <p14:sldIdLst>
             <p14:sldId id="256"/>
           </p14:sldIdLst>
         </p14:section>
-        <p14:section name="Gate" id="{c94f92a6-c1a0-bce8-472f-39e274e7c10e}">
+        <p14:section name="Gate" id="{4879fd2b-a768-7b9e-08d9-cc1acaaf91fe}">
           <p14:sldIdLst>
             <p14:sldId id="257"/>
             <p14:sldId id="258"/>
           </p14:sldIdLst>
         </p14:section>
-        <p14:section name="Pre-teach" id="{3d293dbf-2572-456b-72fe-78a45638167c}">
+        <p14:section name="Pre-teach" id="{c6d686df-3e28-bf89-40ca-28949534984c}">
           <p14:sldIdLst>
             <p14:sldId id="259"/>
           </p14:sldIdLst>
         </p14:section>
-        <p14:section name="Read-along" id="{b31ea870-2937-00a0-462e-fa3fe6a5d880}">
+        <p14:section name="Read-along" id="{c5b926e1-9034-c423-a820-5ee519d761ab}">
           <p14:sldIdLst>
             <p14:sldId id="260"/>
           </p14:sldIdLst>
         </p14:section>
-        <p14:section name="Teach" id="{835ad6ca-1bfe-a77d-fe10-b2bf8d497bd6}">
+        <p14:section name="Teach" id="{d50973f8-8ef0-5843-00d1-7e3bba95cd35}">
           <p14:sldIdLst>
             <p14:sldId id="261"/>
             <p14:sldId id="262"/>
@@ -150,18 +150,18 @@
             <p14:sldId id="264"/>
           </p14:sldIdLst>
         </p14:section>
-        <p14:section name="Routes" id="{7262e95f-801b-2f32-4aaa-2481489b2ca3}">
+        <p14:section name="Routes" id="{b94395cd-ef37-eeec-2c34-b03d43d72248}">
           <p14:sldIdLst>
             <p14:sldId id="265"/>
             <p14:sldId id="266"/>
           </p14:sldIdLst>
         </p14:section>
-        <p14:section name="Close" id="{ef93409e-8861-240a-6306-722bafc6f99b}">
+        <p14:section name="Close" id="{47034d3a-c3ce-4e12-5f69-ae8ab7a98931}">
           <p14:sldIdLst>
             <p14:sldId id="267"/>
           </p14:sldIdLst>
         </p14:section>
-        <p14:section name="Answers" id="{60e10489-d82f-53b6-1c61-31140ad19de0}">
+        <p14:section name="Answers" id="{1e0a9d89-e6a4-0156-fca9-f271a971d447}">
           <p14:sldIdLst>
             <p14:sldId id="268"/>
             <p14:sldId id="269"/>
@@ -1217,7 +1217,7 @@
             <a:r>
               <a:rPr lang="en-US" dirty="0"/>
               <a:t>Do now — retrieval. Silent, no notes, no help: recall comes before any support. Give about four minutes.
-1. What can you say about the current in a series circuit?  →  A   It is the same everywhere in the loop.
+1. What can you say about the current in a series circuit?  →  D   It is the same everywhere in the loop.
 2. A 4 Ω resistor and a 6 Ω resistor are joined in series. Calculate the total resistance in ohms.  →  10 Ω
 3. A 6.0 V supply is connected to two lamps in series. The p.d. across one lamp is 2.5 V. Calculate the p.d. across the other lamp in volts.  →  3.5 V
 Circulate: who gets 3/3 (Stretch route), 2/3 (Core), 0–1 (Support)? Use this to route pupils later in the lesson.</a:t>
@@ -1309,7 +1309,7 @@
             <a:r>
               <a:rPr lang="en-US" dirty="0"/>
               <a:t>Answers — pupils mark their own in a different colour, then hands up for 3/3, 2/3, 1/3.
-1. A   It is the same everywhere in the loop.. A series circuit has one loop, so the same current passes through every component.
+1. D   It is the same everywhere in the loop.. A series circuit has one loop, so the same current passes through every component.
 2. 10 Ω. In series the resistances add: 4 + 6 = 10 Ω. Whole-number data, so a whole-number answer.
 3. 3.5 V. The p.d.s add up to the supply: 6.0 − 2.5 = 3.5 V (2 s.f.).
 Say the route each score points to: 3/3 Stretch, 2/3 Core, 0–1 Support. Pupils may choose to move up.</a:t>
@@ -7622,7 +7622,7 @@
                 <a:ea typeface="Calibri" pitchFamily="34" charset="-122"/>
                 <a:cs typeface="Calibri" pitchFamily="34" charset="-120"/>
               </a:rPr>
-              <a:t>It is the same everywhere in the loop.</a:t>
+              <a:t>It is biggest next to the cell.</a:t>
             </a:r>
             <a:endParaRPr lang="en-US" sz="1800" dirty="0"/>
           </a:p>
@@ -7659,7 +7659,7 @@
                 <a:ea typeface="Calibri" pitchFamily="34" charset="-122"/>
                 <a:cs typeface="Calibri" pitchFamily="34" charset="-120"/>
               </a:rPr>
-              <a:t>It is biggest next to the cell.</a:t>
+              <a:t>It gets used up by each component.</a:t>
             </a:r>
             <a:endParaRPr lang="en-US" sz="1800" dirty="0"/>
           </a:p>
@@ -7696,7 +7696,7 @@
                 <a:ea typeface="Calibri" pitchFamily="34" charset="-122"/>
                 <a:cs typeface="Calibri" pitchFamily="34" charset="-120"/>
               </a:rPr>
-              <a:t>It gets used up by each component.</a:t>
+              <a:t>It splits between the components.</a:t>
             </a:r>
             <a:endParaRPr lang="en-US" sz="1800" dirty="0"/>
           </a:p>
@@ -7733,7 +7733,7 @@
                 <a:ea typeface="Calibri" pitchFamily="34" charset="-122"/>
                 <a:cs typeface="Calibri" pitchFamily="34" charset="-120"/>
               </a:rPr>
-              <a:t>It splits between the components.</a:t>
+              <a:t>It is the same everywhere in the loop.</a:t>
             </a:r>
             <a:endParaRPr lang="en-US" sz="1800" dirty="0"/>
           </a:p>
@@ -8530,7 +8530,7 @@
                 <a:ea typeface="Calibri" pitchFamily="34" charset="-122"/>
                 <a:cs typeface="Calibri" pitchFamily="34" charset="-120"/>
               </a:rPr>
-              <a:t>A   It is the same everywhere in the loop.</a:t>
+              <a:t>D   It is the same everywhere in the loop.</a:t>
             </a:r>
             <a:endParaRPr lang="en-US" sz="2200" dirty="0"/>
           </a:p>

--- a/decks/combined-circuits/combined-circuits_ch5_series-circuits.pptx
+++ b/decks/combined-circuits/combined-circuits_ch5_series-circuits.pptx
@@ -121,28 +121,28 @@
   <p:extLst>
     <p:ext uri="{521415D9-36F7-43E2-AB2F-B90AF26B5E84}">
       <p14:sectionLst xmlns:p14="http://schemas.microsoft.com/office/powerpoint/2010/main">
-        <p14:section name="Opening" id="{cba90bf4-76d9-a2e7-e974-c722737f8ade}">
+        <p14:section name="Opening" id="{c4f9ce37-44a1-2837-3412-69d02bce7876}">
           <p14:sldIdLst>
             <p14:sldId id="256"/>
           </p14:sldIdLst>
         </p14:section>
-        <p14:section name="Gate" id="{4879fd2b-a768-7b9e-08d9-cc1acaaf91fe}">
+        <p14:section name="Gate" id="{7d2a2f6e-168f-485f-690b-3932f2c6acbf}">
           <p14:sldIdLst>
             <p14:sldId id="257"/>
             <p14:sldId id="258"/>
           </p14:sldIdLst>
         </p14:section>
-        <p14:section name="Pre-teach" id="{c6d686df-3e28-bf89-40ca-28949534984c}">
+        <p14:section name="Pre-teach" id="{c77e2065-95b0-d295-0a61-89562a9be9e3}">
           <p14:sldIdLst>
             <p14:sldId id="259"/>
           </p14:sldIdLst>
         </p14:section>
-        <p14:section name="Read-along" id="{c5b926e1-9034-c423-a820-5ee519d761ab}">
+        <p14:section name="Read-along" id="{f5e292bd-f03a-63b8-41b6-3a3d58edbb45}">
           <p14:sldIdLst>
             <p14:sldId id="260"/>
           </p14:sldIdLst>
         </p14:section>
-        <p14:section name="Teach" id="{d50973f8-8ef0-5843-00d1-7e3bba95cd35}">
+        <p14:section name="Teach" id="{775f914b-9329-fc0d-8ee1-9d5289357101}">
           <p14:sldIdLst>
             <p14:sldId id="261"/>
             <p14:sldId id="262"/>
@@ -150,18 +150,18 @@
             <p14:sldId id="264"/>
           </p14:sldIdLst>
         </p14:section>
-        <p14:section name="Routes" id="{b94395cd-ef37-eeec-2c34-b03d43d72248}">
+        <p14:section name="Routes" id="{11b14b53-fcd3-b743-3ca6-39cebe1c298f}">
           <p14:sldIdLst>
             <p14:sldId id="265"/>
             <p14:sldId id="266"/>
           </p14:sldIdLst>
         </p14:section>
-        <p14:section name="Close" id="{47034d3a-c3ce-4e12-5f69-ae8ab7a98931}">
+        <p14:section name="Close" id="{e0b4ab7a-0c37-ea63-4540-b3f2a95a55a4}">
           <p14:sldIdLst>
             <p14:sldId id="267"/>
           </p14:sldIdLst>
         </p14:section>
-        <p14:section name="Answers" id="{1e0a9d89-e6a4-0156-fca9-f271a971d447}">
+        <p14:section name="Answers" id="{03057a10-8da9-ac29-ecd3-b76ec250041b}">
           <p14:sldIdLst>
             <p14:sldId id="268"/>
             <p14:sldId id="269"/>
